--- a/prezentacja.pptx
+++ b/prezentacja.pptx
@@ -268,7 +268,7 @@
           <a:p>
             <a:fld id="{EB147A19-8943-41B8-B74F-79C74EADC4DA}" type="datetimeFigureOut">
               <a:rPr lang="pl-PL" smtClean="0"/>
-              <a:t>10.06.2026</a:t>
+              <a:t>11.06.2026</a:t>
             </a:fld>
             <a:endParaRPr lang="pl-PL"/>
           </a:p>
@@ -468,7 +468,7 @@
           <a:p>
             <a:fld id="{EB147A19-8943-41B8-B74F-79C74EADC4DA}" type="datetimeFigureOut">
               <a:rPr lang="pl-PL" smtClean="0"/>
-              <a:t>10.06.2026</a:t>
+              <a:t>11.06.2026</a:t>
             </a:fld>
             <a:endParaRPr lang="pl-PL"/>
           </a:p>
@@ -678,7 +678,7 @@
           <a:p>
             <a:fld id="{EB147A19-8943-41B8-B74F-79C74EADC4DA}" type="datetimeFigureOut">
               <a:rPr lang="pl-PL" smtClean="0"/>
-              <a:t>10.06.2026</a:t>
+              <a:t>11.06.2026</a:t>
             </a:fld>
             <a:endParaRPr lang="pl-PL"/>
           </a:p>
@@ -878,7 +878,7 @@
           <a:p>
             <a:fld id="{EB147A19-8943-41B8-B74F-79C74EADC4DA}" type="datetimeFigureOut">
               <a:rPr lang="pl-PL" smtClean="0"/>
-              <a:t>10.06.2026</a:t>
+              <a:t>11.06.2026</a:t>
             </a:fld>
             <a:endParaRPr lang="pl-PL"/>
           </a:p>
@@ -1154,7 +1154,7 @@
           <a:p>
             <a:fld id="{EB147A19-8943-41B8-B74F-79C74EADC4DA}" type="datetimeFigureOut">
               <a:rPr lang="pl-PL" smtClean="0"/>
-              <a:t>10.06.2026</a:t>
+              <a:t>11.06.2026</a:t>
             </a:fld>
             <a:endParaRPr lang="pl-PL"/>
           </a:p>
@@ -1422,7 +1422,7 @@
           <a:p>
             <a:fld id="{EB147A19-8943-41B8-B74F-79C74EADC4DA}" type="datetimeFigureOut">
               <a:rPr lang="pl-PL" smtClean="0"/>
-              <a:t>10.06.2026</a:t>
+              <a:t>11.06.2026</a:t>
             </a:fld>
             <a:endParaRPr lang="pl-PL"/>
           </a:p>
@@ -1837,7 +1837,7 @@
           <a:p>
             <a:fld id="{EB147A19-8943-41B8-B74F-79C74EADC4DA}" type="datetimeFigureOut">
               <a:rPr lang="pl-PL" smtClean="0"/>
-              <a:t>10.06.2026</a:t>
+              <a:t>11.06.2026</a:t>
             </a:fld>
             <a:endParaRPr lang="pl-PL"/>
           </a:p>
@@ -1979,7 +1979,7 @@
           <a:p>
             <a:fld id="{EB147A19-8943-41B8-B74F-79C74EADC4DA}" type="datetimeFigureOut">
               <a:rPr lang="pl-PL" smtClean="0"/>
-              <a:t>10.06.2026</a:t>
+              <a:t>11.06.2026</a:t>
             </a:fld>
             <a:endParaRPr lang="pl-PL"/>
           </a:p>
@@ -2092,7 +2092,7 @@
           <a:p>
             <a:fld id="{EB147A19-8943-41B8-B74F-79C74EADC4DA}" type="datetimeFigureOut">
               <a:rPr lang="pl-PL" smtClean="0"/>
-              <a:t>10.06.2026</a:t>
+              <a:t>11.06.2026</a:t>
             </a:fld>
             <a:endParaRPr lang="pl-PL"/>
           </a:p>
@@ -2405,7 +2405,7 @@
           <a:p>
             <a:fld id="{EB147A19-8943-41B8-B74F-79C74EADC4DA}" type="datetimeFigureOut">
               <a:rPr lang="pl-PL" smtClean="0"/>
-              <a:t>10.06.2026</a:t>
+              <a:t>11.06.2026</a:t>
             </a:fld>
             <a:endParaRPr lang="pl-PL"/>
           </a:p>
@@ -2694,7 +2694,7 @@
           <a:p>
             <a:fld id="{EB147A19-8943-41B8-B74F-79C74EADC4DA}" type="datetimeFigureOut">
               <a:rPr lang="pl-PL" smtClean="0"/>
-              <a:t>10.06.2026</a:t>
+              <a:t>11.06.2026</a:t>
             </a:fld>
             <a:endParaRPr lang="pl-PL"/>
           </a:p>
@@ -2937,7 +2937,7 @@
           <a:p>
             <a:fld id="{EB147A19-8943-41B8-B74F-79C74EADC4DA}" type="datetimeFigureOut">
               <a:rPr lang="pl-PL" smtClean="0"/>
-              <a:t>10.06.2026</a:t>
+              <a:t>11.06.2026</a:t>
             </a:fld>
             <a:endParaRPr lang="pl-PL"/>
           </a:p>
@@ -6021,14 +6021,20 @@
           <a:lstStyle/>
           <a:p>
             <a:r>
-              <a:rPr lang="pl-PL" sz="1900" b="1" dirty="0">
+              <a:rPr lang="pl-PL" sz="1900" b="1">
                 <a:solidFill>
                   <a:srgbClr val="247A48"/>
                 </a:solidFill>
                 <a:latin typeface="Aptos" panose="020B0004020202020204" pitchFamily="34" charset="0"/>
               </a:rPr>
-              <a:t>Jak działa?</a:t>
-            </a:r>
+              <a:t>Stan wejściowy: 15 cech</a:t>
+            </a:r>
+            <a:endParaRPr lang="pl-PL" sz="1900" b="1" dirty="0">
+              <a:solidFill>
+                <a:srgbClr val="247A48"/>
+              </a:solidFill>
+              <a:latin typeface="Aptos" panose="020B0004020202020204" pitchFamily="34" charset="0"/>
+            </a:endParaRPr>
           </a:p>
         </p:txBody>
       </p:sp>
@@ -6316,10 +6322,10 @@
       </p:sp>
       <p:pic>
         <p:nvPicPr>
-          <p:cNvPr id="16" name="Picture 15">
-            <a:extLst>
-              <a:ext uri="{FF2B5EF4-FFF2-40B4-BE49-F238E27FC236}">
-                <a16:creationId xmlns:a16="http://schemas.microsoft.com/office/drawing/2014/main" id="{DDF6C8C0-71B1-5FB4-F908-9053DEA86571}"/>
+          <p:cNvPr id="7" name="Picture 6">
+            <a:extLst>
+              <a:ext uri="{FF2B5EF4-FFF2-40B4-BE49-F238E27FC236}">
+                <a16:creationId xmlns:a16="http://schemas.microsoft.com/office/drawing/2014/main" id="{C2F56D8B-9025-85F1-7C56-E3B08DFDC0BC}"/>
               </a:ext>
             </a:extLst>
           </p:cNvPr>
@@ -6507,7 +6513,7 @@
                 </a:solidFill>
                 <a:latin typeface="Aptos" panose="020B0004020202020204" pitchFamily="34" charset="0"/>
               </a:rPr>
-              <a:t>Tablicę Q zastępuje sieć neuronowa</a:t>
+              <a:t>Stan wejściowy: 30 cech</a:t>
             </a:r>
           </a:p>
         </p:txBody>
@@ -6669,7 +6675,7 @@
                 </a:solidFill>
                 <a:latin typeface="Aptos" panose="020B0004020202020204" pitchFamily="34" charset="0"/>
               </a:rPr>
-              <a:t>17,97</a:t>
+              <a:t>23,37</a:t>
             </a:r>
           </a:p>
         </p:txBody>
@@ -6749,7 +6755,7 @@
                 </a:solidFill>
                 <a:latin typeface="Aptos" panose="020B0004020202020204" pitchFamily="34" charset="0"/>
               </a:rPr>
-              <a:t>34</a:t>
+              <a:t>36</a:t>
             </a:r>
           </a:p>
         </p:txBody>
@@ -6796,10 +6802,10 @@
       </p:sp>
       <p:pic>
         <p:nvPicPr>
-          <p:cNvPr id="21" name="Picture 20">
-            <a:extLst>
-              <a:ext uri="{FF2B5EF4-FFF2-40B4-BE49-F238E27FC236}">
-                <a16:creationId xmlns:a16="http://schemas.microsoft.com/office/drawing/2014/main" id="{015D354F-5638-40C6-B8CC-2C5E4BCE5729}"/>
+          <p:cNvPr id="7" name="Picture 6">
+            <a:extLst>
+              <a:ext uri="{FF2B5EF4-FFF2-40B4-BE49-F238E27FC236}">
+                <a16:creationId xmlns:a16="http://schemas.microsoft.com/office/drawing/2014/main" id="{E59B312D-B46C-6167-6A91-BCCC2964C952}"/>
               </a:ext>
             </a:extLst>
           </p:cNvPr>
@@ -6987,7 +6993,7 @@
                 </a:solidFill>
                 <a:latin typeface="Aptos" panose="020B0004020202020204" pitchFamily="34" charset="0"/>
               </a:rPr>
-              <a:t>Ewolucja sieci neuronowych</a:t>
+              <a:t>Stan wejściowy: 30 cech</a:t>
             </a:r>
           </a:p>
         </p:txBody>
@@ -7277,10 +7283,10 @@
       </p:sp>
       <p:pic>
         <p:nvPicPr>
-          <p:cNvPr id="15" name="Picture 14">
-            <a:extLst>
-              <a:ext uri="{FF2B5EF4-FFF2-40B4-BE49-F238E27FC236}">
-                <a16:creationId xmlns:a16="http://schemas.microsoft.com/office/drawing/2014/main" id="{EB1EF251-71B6-50DD-6AD3-46D7E79994BF}"/>
+          <p:cNvPr id="7" name="Picture 6">
+            <a:extLst>
+              <a:ext uri="{FF2B5EF4-FFF2-40B4-BE49-F238E27FC236}">
+                <a16:creationId xmlns:a16="http://schemas.microsoft.com/office/drawing/2014/main" id="{14514646-CBAA-F210-6C2A-3F1825A52BE1}"/>
               </a:ext>
             </a:extLst>
           </p:cNvPr>
@@ -9518,7 +9524,7 @@
                 </a:solidFill>
                 <a:latin typeface="Aptos" panose="020B0004020202020204" pitchFamily="34" charset="0"/>
               </a:rPr>
-              <a:t>17,97</a:t>
+              <a:t>23,37</a:t>
             </a:r>
           </a:p>
         </p:txBody>
@@ -9613,7 +9619,7 @@
                 </a:solidFill>
                 <a:latin typeface="Aptos" panose="020B0004020202020204" pitchFamily="34" charset="0"/>
               </a:rPr>
-              <a:t>34</a:t>
+              <a:t>36</a:t>
             </a:r>
           </a:p>
         </p:txBody>
@@ -9708,7 +9714,7 @@
                 </a:solidFill>
                 <a:latin typeface="Aptos" panose="020B0004020202020204" pitchFamily="34" charset="0"/>
               </a:rPr>
-              <a:t>141,60</a:t>
+              <a:t>220,20</a:t>
             </a:r>
           </a:p>
         </p:txBody>
@@ -10279,6 +10285,46 @@
                 <a:latin typeface="Aptos" panose="020B0004020202020204" pitchFamily="34" charset="0"/>
               </a:rPr>
               <a:t>60 pok.</a:t>
+            </a:r>
+          </a:p>
+        </p:txBody>
+      </p:sp>
+      <p:sp>
+        <p:nvSpPr>
+          <p:cNvPr id="4" name="TextBox 3">
+            <a:extLst>
+              <a:ext uri="{FF2B5EF4-FFF2-40B4-BE49-F238E27FC236}">
+                <a16:creationId xmlns:a16="http://schemas.microsoft.com/office/drawing/2014/main" id="{2DC162B4-1F4E-B1C2-AFE1-C7508DD186EF}"/>
+              </a:ext>
+            </a:extLst>
+          </p:cNvPr>
+          <p:cNvSpPr txBox="1"/>
+          <p:nvPr/>
+        </p:nvSpPr>
+        <p:spPr>
+          <a:xfrm>
+            <a:off x="660400" y="1193800"/>
+            <a:ext cx="10795000" cy="215444"/>
+          </a:xfrm>
+          <a:prstGeom prst="rect">
+            <a:avLst/>
+          </a:prstGeom>
+          <a:noFill/>
+        </p:spPr>
+        <p:txBody>
+          <a:bodyPr vert="horz" lIns="0" tIns="0" rIns="0" bIns="0" rtlCol="0">
+            <a:spAutoFit/>
+          </a:bodyPr>
+          <a:lstStyle/>
+          <a:p>
+            <a:r>
+              <a:rPr lang="pl-PL" sz="1400">
+                <a:solidFill>
+                  <a:srgbClr val="65716D"/>
+                </a:solidFill>
+                <a:latin typeface="Aptos" panose="020B0004020202020204" pitchFamily="34" charset="0"/>
+              </a:rPr>
+              <a:t>Q-learning używa 15 cech, a DQN i NEAT po 30 cech.</a:t>
             </a:r>
           </a:p>
         </p:txBody>
@@ -10460,7 +10506,7 @@
         <p:spPr>
           <a:xfrm>
             <a:off x="660400" y="2095500"/>
-            <a:ext cx="10414000" cy="2339102"/>
+            <a:ext cx="10414000" cy="1461939"/>
           </a:xfrm>
           <a:prstGeom prst="rect">
             <a:avLst/>
@@ -10474,14 +10520,13 @@
           <a:lstStyle/>
           <a:p>
             <a:r>
-              <a:rPr lang="pl-PL" sz="1900">
+              <a:rPr lang="pl-PL" sz="1900" dirty="0">
                 <a:solidFill>
                   <a:srgbClr val="1E2624"/>
                 </a:solidFill>
                 <a:latin typeface="Aptos" panose="020B0004020202020204" pitchFamily="34" charset="0"/>
               </a:rPr>
               <a:t>• Heurystyka okazała się mocnym punktem odniesienia.
-• Q-learning i DQN nauczyły się samodzielnie sterować wężem, ale osiągnęły wyniki niższe od heurystyki.
 • NEAT uzyskał zdecydowanie najwyższy średni wynik.
 • Projekt pokazał różnice między ręcznymi zasadami, uczeniem ze wzmocnieniem i neuroewolucją.</a:t>
             </a:r>
